--- a/УК/практики/УК практика 2.pptx
+++ b/УК/практики/УК практика 2.pptx
@@ -118,6 +118,22 @@
       </a:defRPr>
     </a:lvl9pPr>
   </p:defaultTextStyle>
+  <p:extLst>
+    <p:ext uri="{EFAFB233-063F-42B5-8137-9DF3F51BA10A}">
+      <p15:sldGuideLst xmlns:p15="http://schemas.microsoft.com/office/powerpoint/2012/main">
+        <p15:guide id="1" orient="horz" pos="2160">
+          <p15:clr>
+            <a:srgbClr val="A4A3A4"/>
+          </p15:clr>
+        </p15:guide>
+        <p15:guide id="2" pos="2880">
+          <p15:clr>
+            <a:srgbClr val="A4A3A4"/>
+          </p15:clr>
+        </p15:guide>
+      </p15:sldGuideLst>
+    </p:ext>
+  </p:extLst>
 </p:presentation>
 </file>
 
@@ -303,7 +319,7 @@
             <a:fld id="{5B106E36-FD25-4E2D-B0AA-010F637433A0}" type="datetimeFigureOut">
               <a:rPr lang="ru-RU" smtClean="0"/>
               <a:pPr/>
-              <a:t>12.10.2026</a:t>
+              <a:t>14.10.2026</a:t>
             </a:fld>
             <a:endParaRPr lang="ru-RU"/>
           </a:p>
@@ -470,7 +486,7 @@
             <a:fld id="{5B106E36-FD25-4E2D-B0AA-010F637433A0}" type="datetimeFigureOut">
               <a:rPr lang="ru-RU" smtClean="0"/>
               <a:pPr/>
-              <a:t>12.10.2026</a:t>
+              <a:t>14.10.2026</a:t>
             </a:fld>
             <a:endParaRPr lang="ru-RU"/>
           </a:p>
@@ -647,7 +663,7 @@
             <a:fld id="{5B106E36-FD25-4E2D-B0AA-010F637433A0}" type="datetimeFigureOut">
               <a:rPr lang="ru-RU" smtClean="0"/>
               <a:pPr/>
-              <a:t>12.10.2026</a:t>
+              <a:t>14.10.2026</a:t>
             </a:fld>
             <a:endParaRPr lang="ru-RU"/>
           </a:p>
@@ -814,7 +830,7 @@
             <a:fld id="{5B106E36-FD25-4E2D-B0AA-010F637433A0}" type="datetimeFigureOut">
               <a:rPr lang="ru-RU" smtClean="0"/>
               <a:pPr/>
-              <a:t>12.10.2026</a:t>
+              <a:t>14.10.2026</a:t>
             </a:fld>
             <a:endParaRPr lang="ru-RU"/>
           </a:p>
@@ -1057,7 +1073,7 @@
             <a:fld id="{5B106E36-FD25-4E2D-B0AA-010F637433A0}" type="datetimeFigureOut">
               <a:rPr lang="ru-RU" smtClean="0"/>
               <a:pPr/>
-              <a:t>12.10.2026</a:t>
+              <a:t>14.10.2026</a:t>
             </a:fld>
             <a:endParaRPr lang="ru-RU"/>
           </a:p>
@@ -1342,7 +1358,7 @@
             <a:fld id="{5B106E36-FD25-4E2D-B0AA-010F637433A0}" type="datetimeFigureOut">
               <a:rPr lang="ru-RU" smtClean="0"/>
               <a:pPr/>
-              <a:t>12.10.2026</a:t>
+              <a:t>14.10.2026</a:t>
             </a:fld>
             <a:endParaRPr lang="ru-RU"/>
           </a:p>
@@ -1761,7 +1777,7 @@
             <a:fld id="{5B106E36-FD25-4E2D-B0AA-010F637433A0}" type="datetimeFigureOut">
               <a:rPr lang="ru-RU" smtClean="0"/>
               <a:pPr/>
-              <a:t>12.10.2026</a:t>
+              <a:t>14.10.2026</a:t>
             </a:fld>
             <a:endParaRPr lang="ru-RU"/>
           </a:p>
@@ -1876,7 +1892,7 @@
             <a:fld id="{5B106E36-FD25-4E2D-B0AA-010F637433A0}" type="datetimeFigureOut">
               <a:rPr lang="ru-RU" smtClean="0"/>
               <a:pPr/>
-              <a:t>12.10.2026</a:t>
+              <a:t>14.10.2026</a:t>
             </a:fld>
             <a:endParaRPr lang="ru-RU"/>
           </a:p>
@@ -1968,7 +1984,7 @@
             <a:fld id="{5B106E36-FD25-4E2D-B0AA-010F637433A0}" type="datetimeFigureOut">
               <a:rPr lang="ru-RU" smtClean="0"/>
               <a:pPr/>
-              <a:t>12.10.2026</a:t>
+              <a:t>14.10.2026</a:t>
             </a:fld>
             <a:endParaRPr lang="ru-RU"/>
           </a:p>
@@ -2242,7 +2258,7 @@
             <a:fld id="{5B106E36-FD25-4E2D-B0AA-010F637433A0}" type="datetimeFigureOut">
               <a:rPr lang="ru-RU" smtClean="0"/>
               <a:pPr/>
-              <a:t>12.10.2026</a:t>
+              <a:t>14.10.2026</a:t>
             </a:fld>
             <a:endParaRPr lang="ru-RU"/>
           </a:p>
@@ -2492,7 +2508,7 @@
             <a:fld id="{5B106E36-FD25-4E2D-B0AA-010F637433A0}" type="datetimeFigureOut">
               <a:rPr lang="ru-RU" smtClean="0"/>
               <a:pPr/>
-              <a:t>12.10.2026</a:t>
+              <a:t>14.10.2026</a:t>
             </a:fld>
             <a:endParaRPr lang="ru-RU"/>
           </a:p>
@@ -2702,7 +2718,7 @@
             <a:fld id="{5B106E36-FD25-4E2D-B0AA-010F637433A0}" type="datetimeFigureOut">
               <a:rPr lang="ru-RU" smtClean="0"/>
               <a:pPr/>
-              <a:t>12.10.2026</a:t>
+              <a:t>14.10.2026</a:t>
             </a:fld>
             <a:endParaRPr lang="ru-RU"/>
           </a:p>
@@ -3919,7 +3935,7 @@
     </p:spTree>
     <p:extLst>
       <p:ext uri="{BB962C8B-B14F-4D97-AF65-F5344CB8AC3E}">
-        <p14:creationId xmlns:p14="http://schemas.microsoft.com/office/powerpoint/2010/main" xmlns="" val="285851991"/>
+        <p14:creationId xmlns:p14="http://schemas.microsoft.com/office/powerpoint/2010/main" val="285851991"/>
       </p:ext>
     </p:extLst>
   </p:cSld>
@@ -4016,7 +4032,7 @@
     </p:spTree>
     <p:extLst>
       <p:ext uri="{BB962C8B-B14F-4D97-AF65-F5344CB8AC3E}">
-        <p14:creationId xmlns:p14="http://schemas.microsoft.com/office/powerpoint/2010/main" xmlns="" val="285851991"/>
+        <p14:creationId xmlns:p14="http://schemas.microsoft.com/office/powerpoint/2010/main" val="285851991"/>
       </p:ext>
     </p:extLst>
   </p:cSld>
@@ -4227,7 +4243,7 @@
     </p:spTree>
     <p:extLst>
       <p:ext uri="{BB962C8B-B14F-4D97-AF65-F5344CB8AC3E}">
-        <p14:creationId xmlns:p14="http://schemas.microsoft.com/office/powerpoint/2010/main" xmlns="" val="285851991"/>
+        <p14:creationId xmlns:p14="http://schemas.microsoft.com/office/powerpoint/2010/main" val="285851991"/>
       </p:ext>
     </p:extLst>
   </p:cSld>
@@ -4636,7 +4652,7 @@
     </p:spTree>
     <p:extLst>
       <p:ext uri="{BB962C8B-B14F-4D97-AF65-F5344CB8AC3E}">
-        <p14:creationId xmlns:p14="http://schemas.microsoft.com/office/powerpoint/2010/main" xmlns="" val="285851991"/>
+        <p14:creationId xmlns:p14="http://schemas.microsoft.com/office/powerpoint/2010/main" val="285851991"/>
       </p:ext>
     </p:extLst>
   </p:cSld>
@@ -4672,7 +4688,7 @@
         <p:spPr>
           <a:xfrm>
             <a:off x="0" y="214290"/>
-            <a:ext cx="9144000" cy="6370975"/>
+            <a:ext cx="9144000" cy="6001643"/>
           </a:xfrm>
           <a:prstGeom prst="rect">
             <a:avLst/>
@@ -4686,56 +4702,56 @@
           <a:p>
             <a:pPr algn="just"/>
             <a:r>
-              <a:rPr lang="ru-RU" sz="1700" b="1" dirty="0" err="1" smtClean="0">
+              <a:rPr lang="ru-RU" sz="1600" b="1" dirty="0" err="1" smtClean="0">
                 <a:latin typeface="Times New Roman" pitchFamily="18" charset="0"/>
                 <a:cs typeface="Times New Roman" pitchFamily="18" charset="0"/>
               </a:rPr>
               <a:t>Тест‑дизайн</a:t>
             </a:r>
             <a:r>
-              <a:rPr lang="ru-RU" sz="1700" dirty="0" smtClean="0">
+              <a:rPr lang="ru-RU" sz="1600" dirty="0" smtClean="0">
                 <a:latin typeface="Times New Roman" pitchFamily="18" charset="0"/>
                 <a:cs typeface="Times New Roman" pitchFamily="18" charset="0"/>
               </a:rPr>
               <a:t> — это не просто «придумать тесты», а системный подход к тому, как мы выбираем, что именно проверять, чтобы найти максимум ошибок за разумное время. Его главная задача — превратить расплывчатые требования («</a:t>
             </a:r>
             <a:r>
-              <a:rPr lang="ru-RU" sz="1700" dirty="0" err="1" smtClean="0">
+              <a:rPr lang="ru-RU" sz="1600" dirty="0" err="1" smtClean="0">
                 <a:latin typeface="Times New Roman" pitchFamily="18" charset="0"/>
                 <a:cs typeface="Times New Roman" pitchFamily="18" charset="0"/>
               </a:rPr>
               <a:t>промокод</a:t>
             </a:r>
             <a:r>
-              <a:rPr lang="ru-RU" sz="1700" dirty="0" smtClean="0">
+              <a:rPr lang="ru-RU" sz="1600" dirty="0" smtClean="0">
                 <a:latin typeface="Times New Roman" pitchFamily="18" charset="0"/>
                 <a:cs typeface="Times New Roman" pitchFamily="18" charset="0"/>
               </a:rPr>
               <a:t> должен быть </a:t>
             </a:r>
             <a:r>
-              <a:rPr lang="ru-RU" sz="1700" dirty="0" err="1" smtClean="0">
+              <a:rPr lang="ru-RU" sz="1600" dirty="0" err="1" smtClean="0">
                 <a:latin typeface="Times New Roman" pitchFamily="18" charset="0"/>
                 <a:cs typeface="Times New Roman" pitchFamily="18" charset="0"/>
               </a:rPr>
               <a:t>валидным</a:t>
             </a:r>
             <a:r>
-              <a:rPr lang="ru-RU" sz="1700" dirty="0" smtClean="0">
+              <a:rPr lang="ru-RU" sz="1600" dirty="0" smtClean="0">
                 <a:latin typeface="Times New Roman" pitchFamily="18" charset="0"/>
                 <a:cs typeface="Times New Roman" pitchFamily="18" charset="0"/>
               </a:rPr>
               <a:t>») в конкретные, осмысленные проверки, которые закрывают реальные риски. В учебном проекте это особенно ценно: студент учится не перебирать все возможные варианты (что невозможно), а выделять ключевые сценарии с помощью техник </a:t>
             </a:r>
             <a:r>
-              <a:rPr lang="ru-RU" sz="1700" dirty="0" err="1" smtClean="0">
+              <a:rPr lang="ru-RU" sz="1600" dirty="0" err="1" smtClean="0">
                 <a:latin typeface="Times New Roman" pitchFamily="18" charset="0"/>
                 <a:cs typeface="Times New Roman" pitchFamily="18" charset="0"/>
               </a:rPr>
               <a:t>тест‑дизайна</a:t>
             </a:r>
             <a:r>
-              <a:rPr lang="ru-RU" sz="1700" dirty="0" smtClean="0">
+              <a:rPr lang="ru-RU" sz="1600" dirty="0" smtClean="0">
                 <a:latin typeface="Times New Roman" pitchFamily="18" charset="0"/>
                 <a:cs typeface="Times New Roman" pitchFamily="18" charset="0"/>
               </a:rPr>
@@ -4745,135 +4761,233 @@
           <a:p>
             <a:pPr algn="just"/>
             <a:r>
-              <a:rPr lang="ru-RU" sz="1700" dirty="0" smtClean="0">
+              <a:rPr lang="ru-RU" sz="1600" dirty="0" smtClean="0">
                 <a:latin typeface="Times New Roman" pitchFamily="18" charset="0"/>
                 <a:cs typeface="Times New Roman" pitchFamily="18" charset="0"/>
               </a:rPr>
               <a:t>Для </a:t>
             </a:r>
             <a:r>
-              <a:rPr lang="ru-RU" sz="1700" dirty="0" err="1" smtClean="0">
+              <a:rPr lang="ru-RU" sz="1600" dirty="0" err="1" smtClean="0">
                 <a:latin typeface="Times New Roman" pitchFamily="18" charset="0"/>
                 <a:cs typeface="Times New Roman" pitchFamily="18" charset="0"/>
               </a:rPr>
               <a:t>валидации</a:t>
             </a:r>
             <a:r>
-              <a:rPr lang="ru-RU" sz="1700" dirty="0" smtClean="0">
+              <a:rPr lang="ru-RU" sz="1600" dirty="0" smtClean="0">
                 <a:latin typeface="Times New Roman" pitchFamily="18" charset="0"/>
                 <a:cs typeface="Times New Roman" pitchFamily="18" charset="0"/>
               </a:rPr>
               <a:t> </a:t>
             </a:r>
             <a:r>
-              <a:rPr lang="ru-RU" sz="1700" dirty="0" err="1" smtClean="0">
+              <a:rPr lang="ru-RU" sz="1600" dirty="0" err="1" smtClean="0">
                 <a:latin typeface="Times New Roman" pitchFamily="18" charset="0"/>
                 <a:cs typeface="Times New Roman" pitchFamily="18" charset="0"/>
               </a:rPr>
               <a:t>промокода</a:t>
             </a:r>
             <a:r>
-              <a:rPr lang="ru-RU" sz="1700" dirty="0" smtClean="0">
-                <a:latin typeface="Times New Roman" pitchFamily="18" charset="0"/>
-                <a:cs typeface="Times New Roman" pitchFamily="18" charset="0"/>
-              </a:rPr>
-              <a:t> мы используем несколько техник, каждая из которых закрывает свой тип уязвимостей. Классы эквивалентности помогают разбить все возможные входные строки на группы, где система должна вести себя одинаково: например, все слишком короткие строки — один </a:t>
-            </a:r>
-            <a:r>
-              <a:rPr lang="ru-RU" sz="1700" dirty="0" err="1" smtClean="0">
+              <a:rPr lang="ru-RU" sz="1600" dirty="0" smtClean="0">
+                <a:latin typeface="Times New Roman" pitchFamily="18" charset="0"/>
+                <a:cs typeface="Times New Roman" pitchFamily="18" charset="0"/>
+              </a:rPr>
+              <a:t> мы используем несколько техник, каждая из которых закрывает свой тип уязвимостей. </a:t>
+            </a:r>
+            <a:endParaRPr lang="ru-RU" sz="1600" dirty="0" smtClean="0">
+              <a:latin typeface="Times New Roman" pitchFamily="18" charset="0"/>
+              <a:cs typeface="Times New Roman" pitchFamily="18" charset="0"/>
+            </a:endParaRPr>
+          </a:p>
+          <a:p>
+            <a:pPr algn="just"/>
+            <a:r>
+              <a:rPr lang="ru-RU" sz="1600" b="1" dirty="0" smtClean="0">
+                <a:latin typeface="Times New Roman" pitchFamily="18" charset="0"/>
+                <a:cs typeface="Times New Roman" pitchFamily="18" charset="0"/>
+              </a:rPr>
+              <a:t>Классы </a:t>
+            </a:r>
+            <a:r>
+              <a:rPr lang="ru-RU" sz="1600" b="1" dirty="0" smtClean="0">
+                <a:latin typeface="Times New Roman" pitchFamily="18" charset="0"/>
+                <a:cs typeface="Times New Roman" pitchFamily="18" charset="0"/>
+              </a:rPr>
+              <a:t>эквивалентности </a:t>
+            </a:r>
+            <a:r>
+              <a:rPr lang="ru-RU" sz="1600" dirty="0" smtClean="0">
+                <a:latin typeface="Times New Roman" pitchFamily="18" charset="0"/>
+                <a:cs typeface="Times New Roman" pitchFamily="18" charset="0"/>
+              </a:rPr>
+              <a:t>помогают разбить все возможные входные строки на группы, где система должна вести себя одинаково: например, все слишком короткие строки — один </a:t>
+            </a:r>
+            <a:r>
+              <a:rPr lang="ru-RU" sz="1600" dirty="0" err="1" smtClean="0">
                 <a:latin typeface="Times New Roman" pitchFamily="18" charset="0"/>
                 <a:cs typeface="Times New Roman" pitchFamily="18" charset="0"/>
               </a:rPr>
               <a:t>невалидный</a:t>
             </a:r>
             <a:r>
-              <a:rPr lang="ru-RU" sz="1700" dirty="0" smtClean="0">
-                <a:latin typeface="Times New Roman" pitchFamily="18" charset="0"/>
-                <a:cs typeface="Times New Roman" pitchFamily="18" charset="0"/>
-              </a:rPr>
-              <a:t> класс, все строки со спецсимволами — другой. Граничные значения фокусируются на «опасных» точках: ровно минимальная длина, ровно максимальная, на один символ меньше, на один больше — именно здесь чаще всего прячутся ошибки в условиях кода. Таблица решений нужна, когда логика зависит от нескольких условий сразу: длина, символы, наличие цифры, попадание в чёрный список. Она наглядно показывает, как комбинации этих условий приводят к итоговому результату, и помогает не упустить важные сценарии.</a:t>
-            </a:r>
+              <a:rPr lang="ru-RU" sz="1600" dirty="0" smtClean="0">
+                <a:latin typeface="Times New Roman" pitchFamily="18" charset="0"/>
+                <a:cs typeface="Times New Roman" pitchFamily="18" charset="0"/>
+              </a:rPr>
+              <a:t> класс, все строки со спецсимволами — другой. </a:t>
+            </a:r>
+            <a:endParaRPr lang="ru-RU" sz="1600" dirty="0" smtClean="0">
+              <a:latin typeface="Times New Roman" pitchFamily="18" charset="0"/>
+              <a:cs typeface="Times New Roman" pitchFamily="18" charset="0"/>
+            </a:endParaRPr>
           </a:p>
           <a:p>
             <a:pPr algn="just"/>
             <a:r>
-              <a:rPr lang="ru-RU" sz="1700" dirty="0" smtClean="0">
-                <a:latin typeface="Times New Roman" pitchFamily="18" charset="0"/>
-                <a:cs typeface="Times New Roman" pitchFamily="18" charset="0"/>
-              </a:rPr>
-              <a:t>Такой подход напрямую связан с принципами SQA, которые ты разбираешь на лекциях: качество закладывается не в момент поиска </a:t>
-            </a:r>
-            <a:r>
-              <a:rPr lang="ru-RU" sz="1700" dirty="0" err="1" smtClean="0">
-                <a:latin typeface="Times New Roman" pitchFamily="18" charset="0"/>
-                <a:cs typeface="Times New Roman" pitchFamily="18" charset="0"/>
-              </a:rPr>
-              <a:t>багов</a:t>
-            </a:r>
-            <a:r>
-              <a:rPr lang="ru-RU" sz="1700" dirty="0" smtClean="0">
-                <a:latin typeface="Times New Roman" pitchFamily="18" charset="0"/>
-                <a:cs typeface="Times New Roman" pitchFamily="18" charset="0"/>
-              </a:rPr>
-              <a:t>, а на этапе планирования проверок. Когда студент явно фиксирует классы эквивалентности, границы и комбинации условий, он формирует воспроизводимую стратегию тестирования — её можно обсудить, проверить на полноту и использовать как основу и для ручных проверок, и для </a:t>
-            </a:r>
-            <a:r>
-              <a:rPr lang="ru-RU" sz="1700" dirty="0" err="1" smtClean="0">
+              <a:rPr lang="ru-RU" sz="1600" b="1" dirty="0" smtClean="0">
+                <a:latin typeface="Times New Roman" pitchFamily="18" charset="0"/>
+                <a:cs typeface="Times New Roman" pitchFamily="18" charset="0"/>
+              </a:rPr>
+              <a:t>Граничные </a:t>
+            </a:r>
+            <a:r>
+              <a:rPr lang="ru-RU" sz="1600" b="1" dirty="0" smtClean="0">
+                <a:latin typeface="Times New Roman" pitchFamily="18" charset="0"/>
+                <a:cs typeface="Times New Roman" pitchFamily="18" charset="0"/>
+              </a:rPr>
+              <a:t>значения </a:t>
+            </a:r>
+            <a:r>
+              <a:rPr lang="ru-RU" sz="1600" dirty="0" smtClean="0">
+                <a:latin typeface="Times New Roman" pitchFamily="18" charset="0"/>
+                <a:cs typeface="Times New Roman" pitchFamily="18" charset="0"/>
+              </a:rPr>
+              <a:t>фокусируются на «опасных» точках: ровно минимальная длина, ровно максимальная, на один символ меньше, на один больше — именно здесь чаще всего прячутся ошибки в условиях кода. </a:t>
+            </a:r>
+            <a:endParaRPr lang="ru-RU" sz="1600" dirty="0" smtClean="0">
+              <a:latin typeface="Times New Roman" pitchFamily="18" charset="0"/>
+              <a:cs typeface="Times New Roman" pitchFamily="18" charset="0"/>
+            </a:endParaRPr>
+          </a:p>
+          <a:p>
+            <a:pPr algn="just"/>
+            <a:r>
+              <a:rPr lang="ru-RU" sz="1600" b="1" dirty="0" smtClean="0">
+                <a:latin typeface="Times New Roman" pitchFamily="18" charset="0"/>
+                <a:cs typeface="Times New Roman" pitchFamily="18" charset="0"/>
+              </a:rPr>
+              <a:t>Таблица </a:t>
+            </a:r>
+            <a:r>
+              <a:rPr lang="ru-RU" sz="1600" b="1" dirty="0" smtClean="0">
+                <a:latin typeface="Times New Roman" pitchFamily="18" charset="0"/>
+                <a:cs typeface="Times New Roman" pitchFamily="18" charset="0"/>
+              </a:rPr>
+              <a:t>решений </a:t>
+            </a:r>
+            <a:r>
+              <a:rPr lang="ru-RU" sz="1600" dirty="0" smtClean="0">
+                <a:latin typeface="Times New Roman" pitchFamily="18" charset="0"/>
+                <a:cs typeface="Times New Roman" pitchFamily="18" charset="0"/>
+              </a:rPr>
+              <a:t>нужна, когда логика зависит от нескольких условий сразу: длина, символы, наличие цифры, попадание в чёрный список. Она наглядно показывает, как комбинации этих условий приводят к итоговому результату, и помогает не упустить важные сценарии.</a:t>
+            </a:r>
+          </a:p>
+          <a:p>
+            <a:pPr algn="just"/>
+            <a:r>
+              <a:rPr lang="ru-RU" sz="1600" dirty="0" smtClean="0">
+                <a:latin typeface="Times New Roman" pitchFamily="18" charset="0"/>
+                <a:cs typeface="Times New Roman" pitchFamily="18" charset="0"/>
+              </a:rPr>
+              <a:t>Такой подход напрямую связан с принципами </a:t>
+            </a:r>
+            <a:r>
+              <a:rPr lang="ru-RU" sz="1600" dirty="0" smtClean="0">
+                <a:latin typeface="Times New Roman" pitchFamily="18" charset="0"/>
+                <a:cs typeface="Times New Roman" pitchFamily="18" charset="0"/>
+              </a:rPr>
+              <a:t>SQA: </a:t>
+            </a:r>
+            <a:r>
+              <a:rPr lang="ru-RU" sz="1600" dirty="0" smtClean="0">
+                <a:latin typeface="Times New Roman" pitchFamily="18" charset="0"/>
+                <a:cs typeface="Times New Roman" pitchFamily="18" charset="0"/>
+              </a:rPr>
+              <a:t>качество закладывается не в момент поиска багов, а на этапе планирования проверок. Когда </a:t>
+            </a:r>
+            <a:r>
+              <a:rPr lang="ru-RU" sz="1600" dirty="0" smtClean="0">
+                <a:latin typeface="Times New Roman" pitchFamily="18" charset="0"/>
+                <a:cs typeface="Times New Roman" pitchFamily="18" charset="0"/>
+              </a:rPr>
+              <a:t>разработчик явно </a:t>
+            </a:r>
+            <a:r>
+              <a:rPr lang="ru-RU" sz="1600" dirty="0" smtClean="0">
+                <a:latin typeface="Times New Roman" pitchFamily="18" charset="0"/>
+                <a:cs typeface="Times New Roman" pitchFamily="18" charset="0"/>
+              </a:rPr>
+              <a:t>фиксирует классы эквивалентности, границы и комбинации условий, он формирует воспроизводимую стратегию тестирования — её можно обсудить, проверить на полноту и использовать как основу и для ручных проверок, и для </a:t>
+            </a:r>
+            <a:r>
+              <a:rPr lang="ru-RU" sz="1600" dirty="0" err="1" smtClean="0">
                 <a:latin typeface="Times New Roman" pitchFamily="18" charset="0"/>
                 <a:cs typeface="Times New Roman" pitchFamily="18" charset="0"/>
               </a:rPr>
               <a:t>автотестов</a:t>
             </a:r>
             <a:r>
-              <a:rPr lang="ru-RU" sz="1700" dirty="0" smtClean="0">
+              <a:rPr lang="ru-RU" sz="1600" dirty="0" smtClean="0">
                 <a:latin typeface="Times New Roman" pitchFamily="18" charset="0"/>
                 <a:cs typeface="Times New Roman" pitchFamily="18" charset="0"/>
               </a:rPr>
               <a:t>. Именно эту стратегию мы и будем документировать в README, а затем </a:t>
             </a:r>
             <a:r>
-              <a:rPr lang="ru-RU" sz="1700" dirty="0" err="1" smtClean="0">
+              <a:rPr lang="ru-RU" sz="1600" dirty="0" err="1" smtClean="0">
                 <a:latin typeface="Times New Roman" pitchFamily="18" charset="0"/>
                 <a:cs typeface="Times New Roman" pitchFamily="18" charset="0"/>
               </a:rPr>
               <a:t>версионировать</a:t>
             </a:r>
             <a:r>
-              <a:rPr lang="ru-RU" sz="1700" dirty="0" smtClean="0">
+              <a:rPr lang="ru-RU" sz="1600" dirty="0" smtClean="0">
                 <a:latin typeface="Times New Roman" pitchFamily="18" charset="0"/>
                 <a:cs typeface="Times New Roman" pitchFamily="18" charset="0"/>
               </a:rPr>
               <a:t> в </a:t>
             </a:r>
             <a:r>
-              <a:rPr lang="ru-RU" sz="1700" dirty="0" err="1" smtClean="0">
+              <a:rPr lang="ru-RU" sz="1600" dirty="0" err="1" smtClean="0">
                 <a:latin typeface="Times New Roman" pitchFamily="18" charset="0"/>
                 <a:cs typeface="Times New Roman" pitchFamily="18" charset="0"/>
               </a:rPr>
               <a:t>Git</a:t>
             </a:r>
             <a:r>
-              <a:rPr lang="ru-RU" sz="1700" dirty="0" smtClean="0">
+              <a:rPr lang="ru-RU" sz="1600" dirty="0" smtClean="0">
                 <a:latin typeface="Times New Roman" pitchFamily="18" charset="0"/>
                 <a:cs typeface="Times New Roman" pitchFamily="18" charset="0"/>
               </a:rPr>
               <a:t>: так </a:t>
             </a:r>
             <a:r>
-              <a:rPr lang="ru-RU" sz="1700" dirty="0" err="1" smtClean="0">
+              <a:rPr lang="ru-RU" sz="1600" dirty="0" err="1" smtClean="0">
                 <a:latin typeface="Times New Roman" pitchFamily="18" charset="0"/>
                 <a:cs typeface="Times New Roman" pitchFamily="18" charset="0"/>
               </a:rPr>
               <a:t>тест‑дизайн</a:t>
             </a:r>
             <a:r>
-              <a:rPr lang="ru-RU" sz="1700" dirty="0" smtClean="0">
+              <a:rPr lang="ru-RU" sz="1600" dirty="0" smtClean="0">
                 <a:latin typeface="Times New Roman" pitchFamily="18" charset="0"/>
                 <a:cs typeface="Times New Roman" pitchFamily="18" charset="0"/>
               </a:rPr>
               <a:t> становится не личным набором идей, а прозрачной, проверяемой частью проекта, которую понимает вся команда.</a:t>
             </a:r>
-            <a:endParaRPr lang="ru-RU" sz="1700" dirty="0">
+            <a:endParaRPr lang="ru-RU" sz="1600" dirty="0">
               <a:latin typeface="Times New Roman" pitchFamily="18" charset="0"/>
               <a:cs typeface="Times New Roman" pitchFamily="18" charset="0"/>
             </a:endParaRPr>
@@ -5660,9 +5774,59 @@
         </p:xfrm>
         <a:graphic>
           <a:graphicData uri="http://schemas.openxmlformats.org/presentationml/2006/ole">
-            <p:oleObj spid="_x0000_s1026" name="Точечный рисунок" r:id="rId3" imgW="4667902" imgH="5582429" progId="PBrush">
-              <p:embed/>
-            </p:oleObj>
+            <mc:AlternateContent xmlns:mc="http://schemas.openxmlformats.org/markup-compatibility/2006">
+              <mc:Choice xmlns:v="urn:schemas-microsoft-com:vml" Requires="v">
+                <p:oleObj spid="_x0000_s1028" name="Точечный рисунок" r:id="rId3" imgW="4667902" imgH="5582429" progId="PBrush">
+                  <p:embed/>
+                </p:oleObj>
+              </mc:Choice>
+              <mc:Fallback>
+                <p:oleObj name="Точечный рисунок" r:id="rId3" imgW="4667902" imgH="5582429" progId="PBrush">
+                  <p:embed/>
+                  <p:pic>
+                    <p:nvPicPr>
+                      <p:cNvPr id="0" name="Picture 2"/>
+                      <p:cNvPicPr>
+                        <a:picLocks noChangeAspect="1" noChangeArrowheads="1"/>
+                      </p:cNvPicPr>
+                      <p:nvPr/>
+                    </p:nvPicPr>
+                    <p:blipFill>
+                      <a:blip r:embed="rId4">
+                        <a:extLst>
+                          <a:ext uri="{28A0092B-C50C-407E-A947-70E740481C1C}">
+                            <a14:useLocalDpi xmlns:a14="http://schemas.microsoft.com/office/drawing/2010/main" val="0"/>
+                          </a:ext>
+                        </a:extLst>
+                      </a:blip>
+                      <a:srcRect/>
+                      <a:stretch>
+                        <a:fillRect/>
+                      </a:stretch>
+                    </p:blipFill>
+                    <p:spPr bwMode="auto">
+                      <a:xfrm>
+                        <a:off x="214282" y="500042"/>
+                        <a:ext cx="3409950" cy="5553075"/>
+                      </a:xfrm>
+                      <a:prstGeom prst="rect">
+                        <a:avLst/>
+                      </a:prstGeom>
+                      <a:noFill/>
+                      <a:extLst>
+                        <a:ext uri="{909E8E84-426E-40DD-AFC4-6F175D3DCCD1}">
+                          <a14:hiddenFill xmlns:a14="http://schemas.microsoft.com/office/drawing/2010/main">
+                            <a:solidFill>
+                              <a:srgbClr val="FFFFFF"/>
+                            </a:solidFill>
+                          </a14:hiddenFill>
+                        </a:ext>
+                      </a:extLst>
+                    </p:spPr>
+                  </p:pic>
+                </p:oleObj>
+              </mc:Fallback>
+            </mc:AlternateContent>
           </a:graphicData>
         </a:graphic>
       </p:graphicFrame>
@@ -5718,9 +5882,59 @@
         </p:xfrm>
         <a:graphic>
           <a:graphicData uri="http://schemas.openxmlformats.org/presentationml/2006/ole">
-            <p:oleObj spid="_x0000_s1027" name="Точечный рисунок" r:id="rId4" imgW="2142857" imgH="5266667" progId="PBrush">
-              <p:embed/>
-            </p:oleObj>
+            <mc:AlternateContent xmlns:mc="http://schemas.openxmlformats.org/markup-compatibility/2006">
+              <mc:Choice xmlns:v="urn:schemas-microsoft-com:vml" Requires="v">
+                <p:oleObj spid="_x0000_s1029" name="Точечный рисунок" r:id="rId5" imgW="2142857" imgH="5266667" progId="PBrush">
+                  <p:embed/>
+                </p:oleObj>
+              </mc:Choice>
+              <mc:Fallback>
+                <p:oleObj name="Точечный рисунок" r:id="rId5" imgW="2142857" imgH="5266667" progId="PBrush">
+                  <p:embed/>
+                  <p:pic>
+                    <p:nvPicPr>
+                      <p:cNvPr id="0" name="Picture 3"/>
+                      <p:cNvPicPr>
+                        <a:picLocks noChangeAspect="1" noChangeArrowheads="1"/>
+                      </p:cNvPicPr>
+                      <p:nvPr/>
+                    </p:nvPicPr>
+                    <p:blipFill>
+                      <a:blip r:embed="rId6">
+                        <a:extLst>
+                          <a:ext uri="{28A0092B-C50C-407E-A947-70E740481C1C}">
+                            <a14:useLocalDpi xmlns:a14="http://schemas.microsoft.com/office/drawing/2010/main" val="0"/>
+                          </a:ext>
+                        </a:extLst>
+                      </a:blip>
+                      <a:srcRect/>
+                      <a:stretch>
+                        <a:fillRect/>
+                      </a:stretch>
+                    </p:blipFill>
+                    <p:spPr bwMode="auto">
+                      <a:xfrm>
+                        <a:off x="3714744" y="428604"/>
+                        <a:ext cx="2333625" cy="5762625"/>
+                      </a:xfrm>
+                      <a:prstGeom prst="rect">
+                        <a:avLst/>
+                      </a:prstGeom>
+                      <a:noFill/>
+                      <a:extLst>
+                        <a:ext uri="{909E8E84-426E-40DD-AFC4-6F175D3DCCD1}">
+                          <a14:hiddenFill xmlns:a14="http://schemas.microsoft.com/office/drawing/2010/main">
+                            <a:solidFill>
+                              <a:srgbClr val="FFFFFF"/>
+                            </a:solidFill>
+                          </a14:hiddenFill>
+                        </a:ext>
+                      </a:extLst>
+                    </p:spPr>
+                  </p:pic>
+                </p:oleObj>
+              </mc:Fallback>
+            </mc:AlternateContent>
           </a:graphicData>
         </a:graphic>
       </p:graphicFrame>
